--- a/cursos/recursos/desequilibrios-de-material/16-dama-contra-piezas-modo-supervivencia.pptx
+++ b/cursos/recursos/desequilibrios-de-material/16-dama-contra-piezas-modo-supervivencia.pptx
@@ -3485,7 +3485,7 @@
                 </a:solidFill>
                 <a:latin typeface="Calibri"/>
               </a:rPr>
-              <a:t>Pista: Pensá en una entrega de material que cambie por completo el carácter de la partida, no en una simple retirada de la dama.</a:t>
+              <a:t>Pista: Piensa en una entrega de material que cambie por completo el carácter de la partida, no en una simple retirada de la dama.</a:t>
             </a:r>
           </a:p>
         </p:txBody>
@@ -4454,7 +4454,7 @@
                 </a:solidFill>
                 <a:latin typeface="Calibri"/>
               </a:rPr>
-              <a:t>Pista: Pensá en avanzar el peón que está justo delante del rey, aunque parezca antipositional.</a:t>
+              <a:t>Pista: Piensa en avanzar el peón que está justo delante del rey, aunque parezca antipositional.</a:t>
             </a:r>
           </a:p>
         </p:txBody>
@@ -5632,7 +5632,7 @@
                 </a:solidFill>
                 <a:latin typeface="Calibri"/>
               </a:rPr>
-              <a:t>Pista: Pensá en un avance de peón en el flanco de dama que ataque a una pieza negra y prepare un sacrificio posterior.</a:t>
+              <a:t>Pista: Piensa en un avance de peón en el flanco de dama que ataque a una pieza negra y prepare un sacrificio posterior.</a:t>
             </a:r>
           </a:p>
         </p:txBody>
@@ -5955,7 +5955,7 @@
                 </a:solidFill>
                 <a:latin typeface="Calibri"/>
               </a:rPr>
-              <a:t>Pista: Pensá en un nuevo avance de peón en el flanco de dama que ataca directamente a una pieza negra clave.</a:t>
+              <a:t>Pista: Piensa en un nuevo avance de peón en el flanco de dama que ataca directamente a una pieza negra clave.</a:t>
             </a:r>
           </a:p>
         </p:txBody>
@@ -6776,7 +6776,7 @@
                 </a:solidFill>
                 <a:latin typeface="Calibri"/>
               </a:rPr>
-              <a:t>Pista: Pensá en avanzar el peón de torre del flanco de dama, ganando espacio sin crear debilidades propias.</a:t>
+              <a:t>Pista: Piensa en avanzar el peón de torre del flanco de dama, ganando espacio sin crear debilidades propias.</a:t>
             </a:r>
           </a:p>
         </p:txBody>
@@ -7099,7 +7099,7 @@
                 </a:solidFill>
                 <a:latin typeface="Calibri"/>
               </a:rPr>
-              <a:t>Pista: Pensá en reubicar al alfil para liberar la casilla que necesita el caballo.</a:t>
+              <a:t>Pista: Piensa en reubicar al alfil para liberar la casilla que necesita el caballo.</a:t>
             </a:r>
           </a:p>
         </p:txBody>
@@ -7954,7 +7954,7 @@
                 </a:solidFill>
                 <a:latin typeface="Calibri"/>
               </a:rPr>
-              <a:t>Pista: Pensá en capturar una pieza defendida sobre c3 con la dama, aceptando quedarte sólo con dos piezas menores a cambio.</a:t>
+              <a:t>Pista: Piensa en capturar una pieza defendida sobre c3 con la dama, aceptando quedarte sólo con dos piezas menores a cambio.</a:t>
             </a:r>
           </a:p>
         </p:txBody>
@@ -8277,7 +8277,7 @@
                 </a:solidFill>
                 <a:latin typeface="Calibri"/>
               </a:rPr>
-              <a:t>Pista: Pensá en una jugada de caballo que no recupera material, sino que refuerza la posición negra.</a:t>
+              <a:t>Pista: Piensa en una jugada de caballo que no recupera material, sino que refuerza la posición negra.</a:t>
             </a:r>
           </a:p>
         </p:txBody>
@@ -8600,7 +8600,7 @@
                 </a:solidFill>
                 <a:latin typeface="Calibri"/>
               </a:rPr>
-              <a:t>Pista: Pensá en retirar el alfil a una casilla donde siga vivo, evitando el intercambio que buscan las blancas.</a:t>
+              <a:t>Pista: Piensa en retirar el alfil a una casilla donde siga vivo, evitando el intercambio que buscan las blancas.</a:t>
             </a:r>
           </a:p>
         </p:txBody>
@@ -8923,7 +8923,7 @@
                 </a:solidFill>
                 <a:latin typeface="Calibri"/>
               </a:rPr>
-              <a:t>Pista: Pensá en capturar un peón que abre nuevas líneas hacia el rey blanco, en vez del peón que de todos modos vas a ganar después.</a:t>
+              <a:t>Pista: Piensa en capturar un peón que abre nuevas líneas hacia el rey blanco, en vez del peón que de todos modos vas a ganar después.</a:t>
             </a:r>
           </a:p>
         </p:txBody>
@@ -9389,7 +9389,7 @@
                 </a:solidFill>
                 <a:latin typeface="Calibri"/>
               </a:rPr>
-              <a:t>Pista: Pensá en una jugada de caballo que amenace un jaque mate rápido junto con las torres y el alfil negros.</a:t>
+              <a:t>Pista: Piensa en una jugada de caballo que amenace un jaque mate rápido junto con las torres y el alfil negros.</a:t>
             </a:r>
           </a:p>
         </p:txBody>
@@ -9785,7 +9785,7 @@
                 </a:solidFill>
                 <a:latin typeface="Calibri"/>
               </a:rPr>
-              <a:t>Jugá contra el motor la posición de Flores–Pichot con el bando de las piezas menores, aplicando las cinco reglas del modo supervivencia y evaluando en cada jugada si tu rey sigue realmente seguro. Después revisá Firouzja–Karthikeyan y anotá en qué momento la dama rival empieza a necesitar protección en vez de atacar.</a:t>
+              <a:t>Juega contra el motor la posición de Flores–Pichot con el bando de las piezas menores, aplicando las cinco reglas del modo supervivencia y evaluando en cada jugada si tu rey sigue realmente seguro. Después revisa Firouzja–Karthikeyan y anota en qué momento la dama rival empieza a necesitar protección en vez de atacar.</a:t>
             </a:r>
           </a:p>
           <a:p>
@@ -9817,7 +9817,7 @@
                 </a:solidFill>
                 <a:latin typeface="Calibri"/>
               </a:rPr>
-              <a:t>En la página del curso podés recorrer cada partida con los comentarios, adivinar las jugadas clave en el tablero y continuar cualquier posición contra el motor (Stockfish). La hoja de ejercicios en PDF reúne los momentos clave de esta lección para resolver sin tablero.</a:t>
+              <a:t>En la página del curso puedes recorrer cada partida con los comentarios, adivinar las jugadas clave en el tablero y continuar cualquier posición contra el motor (Stockfish). La hoja de ejercicios en PDF reúne los momentos clave de esta lección para resolver sin tablero.</a:t>
             </a:r>
           </a:p>
         </p:txBody>
@@ -9856,7 +9856,7 @@
                 </a:solidFill>
                 <a:latin typeface="Calibri"/>
               </a:rPr>
-              <a:t>•  Primero recorré la partida completa leyendo los comentarios.</a:t>
+              <a:t>•  Primero recorre la partida completa leyendo los comentarios.</a:t>
             </a:r>
           </a:p>
           <a:p>
@@ -9872,7 +9872,7 @@
                 </a:solidFill>
                 <a:latin typeface="Calibri"/>
               </a:rPr>
-              <a:t>•  Después hacé el modo "adivinar las jugadas clave" hasta acertar todas.</a:t>
+              <a:t>•  Después haz el modo "adivinar las jugadas clave" hasta acertar todas.</a:t>
             </a:r>
           </a:p>
           <a:p>
@@ -9888,7 +9888,7 @@
                 </a:solidFill>
                 <a:latin typeface="Calibri"/>
               </a:rPr>
-              <a:t>•  Por último respondé el cuestionario y anotá con tus palabras las reglas de la lección.</a:t>
+              <a:t>•  Por último responde el cuestionario y anota con tus palabras las reglas de la lección.</a:t>
             </a:r>
           </a:p>
         </p:txBody>
@@ -10476,7 +10476,7 @@
                 </a:solidFill>
                 <a:latin typeface="Calibri"/>
               </a:rPr>
-              <a:t>•  Priorizá la estabilidad por encima de todo: un refugio imperfecto sigue siendo mejor que una posición abierta.</a:t>
+              <a:t>•  Prioriza la estabilidad por encima de todo: un refugio imperfecto sigue siendo mejor que una posición abierta.</a:t>
             </a:r>
           </a:p>
           <a:p>
@@ -10492,7 +10492,7 @@
                 </a:solidFill>
                 <a:latin typeface="Calibri"/>
               </a:rPr>
-              <a:t>•  Cambiá peones y reducí el juego a un solo flanco para dificultar que el rival abra un segundo frente.</a:t>
+              <a:t>•  Cambia peones y reduce el juego a un solo flanco para dificultar que el rival abra un segundo frente.</a:t>
             </a:r>
           </a:p>
           <a:p>
@@ -10508,7 +10508,7 @@
                 </a:solidFill>
                 <a:latin typeface="Calibri"/>
               </a:rPr>
-              <a:t>•  Desconfiá de los cambios de piezas: acercan al bando sin dama a quedarse sin ejército de defensa.</a:t>
+              <a:t>•  Desconfía de los cambios de piezas: acercan al bando sin dama a quedarse sin ejército de defensa.</a:t>
             </a:r>
           </a:p>
           <a:p>
@@ -10524,7 +10524,7 @@
                 </a:solidFill>
                 <a:latin typeface="Calibri"/>
               </a:rPr>
-              <a:t>•  Creá peones pasados propios: generan contrajuego y presión psicológica sobre el rival.</a:t>
+              <a:t>•  Crea peones pasados propios: generan contrajuego y presión psicológica sobre el rival.</a:t>
             </a:r>
           </a:p>
           <a:p>
